--- a/taxi-ev-sochi/output/Электромобили_в_таксопарке_Сочи.pptx
+++ b/taxi-ev-sochi/output/Электромобили_в_таксопарке_Сочи.pptx
@@ -306,7 +306,7 @@
                   <c:v>1240</c:v>
                 </c:pt>
                 <c:pt idx="2">
-                  <c:v>2165</c:v>
+                  <c:v>2164</c:v>
                 </c:pt>
               </c:numCache>
             </c:numRef>
@@ -388,7 +388,7 @@
                 <c:formatCode>General</c:formatCode>
                 <c:ptCount val="3"/>
                 <c:pt idx="0">
-                  <c:v>1770</c:v>
+                  <c:v>1719</c:v>
                 </c:pt>
                 <c:pt idx="1">
                   <c:v>832</c:v>
@@ -835,16 +835,16 @@
                   <c:v>1027</c:v>
                 </c:pt>
                 <c:pt idx="1">
-                  <c:v>1737</c:v>
+                  <c:v>1720</c:v>
                 </c:pt>
                 <c:pt idx="2">
-                  <c:v>2447</c:v>
+                  <c:v>2413</c:v>
                 </c:pt>
                 <c:pt idx="3">
-                  <c:v>3157</c:v>
+                  <c:v>3106</c:v>
                 </c:pt>
                 <c:pt idx="4">
-                  <c:v>3867</c:v>
+                  <c:v>3798</c:v>
                 </c:pt>
               </c:numCache>
             </c:numRef>
@@ -914,10 +914,10 @@
                   <c:v>2234</c:v>
                 </c:pt>
                 <c:pt idx="3">
-                  <c:v>2627</c:v>
+                  <c:v>2626</c:v>
                 </c:pt>
                 <c:pt idx="4">
-                  <c:v>3019</c:v>
+                  <c:v>3018</c:v>
                 </c:pt>
               </c:numCache>
             </c:numRef>
@@ -982,16 +982,16 @@
                   <c:v>2374</c:v>
                 </c:pt>
                 <c:pt idx="1">
-                  <c:v>2767</c:v>
+                  <c:v>2766</c:v>
                 </c:pt>
                 <c:pt idx="2">
-                  <c:v>3159</c:v>
+                  <c:v>3158</c:v>
                 </c:pt>
                 <c:pt idx="3">
-                  <c:v>3551</c:v>
+                  <c:v>3550</c:v>
                 </c:pt>
                 <c:pt idx="4">
-                  <c:v>3944</c:v>
+                  <c:v>3942</c:v>
                 </c:pt>
               </c:numCache>
             </c:numRef>
@@ -1451,10 +1451,10 @@
                   <c:v>Пробег 60 тыс. км/год вместо 90</c:v>
                 </c:pt>
                 <c:pt idx="3">
-                  <c:v>Остаточная стоимость ЭМ 15% вместо 22%</c:v>
+                  <c:v>Простой на зарядку 6% вместо 3%</c:v>
                 </c:pt>
                 <c:pt idx="4">
-                  <c:v>Простой на зарядку 6% вместо 3%</c:v>
+                  <c:v>Остаточная стоимость ЭМ 15% вместо 22%</c:v>
                 </c:pt>
                 <c:pt idx="5">
                   <c:v>Расход 24 кВт·ч/100 км (жара, горы)</c:v>
@@ -1463,7 +1463,7 @@
                   <c:v>Базовый сценарий</c:v>
                 </c:pt>
                 <c:pt idx="7">
-                  <c:v>Топливо +20% (АИ-92 → 83 ₽/л)</c:v>
+                  <c:v>Топливо +20% (АИ-92 → 80 ₽/л)</c:v>
                 </c:pt>
               </c:strCache>
             </c:strRef>
@@ -1475,28 +1475,28 @@
                 <c:formatCode>General</c:formatCode>
                 <c:ptCount val="8"/>
                 <c:pt idx="0">
-                  <c:v>-394</c:v>
+                  <c:v>-445</c:v>
                 </c:pt>
                 <c:pt idx="1">
-                  <c:v>175</c:v>
+                  <c:v>124</c:v>
                 </c:pt>
                 <c:pt idx="2">
-                  <c:v>219</c:v>
+                  <c:v>184</c:v>
                 </c:pt>
                 <c:pt idx="3">
-                  <c:v>337</c:v>
+                  <c:v>286</c:v>
                 </c:pt>
                 <c:pt idx="4">
-                  <c:v>337</c:v>
+                  <c:v>286</c:v>
                 </c:pt>
                 <c:pt idx="5">
-                  <c:v>365</c:v>
+                  <c:v>314</c:v>
                 </c:pt>
                 <c:pt idx="6">
-                  <c:v>531</c:v>
+                  <c:v>480</c:v>
                 </c:pt>
                 <c:pt idx="7">
-                  <c:v>885</c:v>
+                  <c:v>824</c:v>
                 </c:pt>
               </c:numCache>
             </c:numRef>
@@ -20672,7 +20672,7 @@
                 <a:ea typeface="Calibri"/>
                 <a:cs typeface="Calibri"/>
               </a:rPr>
-              <a:t>Электромобили действительно набирают популярность, но 0,9% рынка — это не аргумент для решения по парку</a:t>
+              <a:t>Рынок гибридов и электромобилей удвоился за год, но чистые электромобили — это по-прежнему 0,9% продаж</a:t>
             </a:r>
           </a:p>
         </p:txBody>
@@ -20709,7 +20709,7 @@
                 <a:ea typeface="Calibri"/>
                 <a:cs typeface="Calibri"/>
               </a:rPr>
-              <a:t>Источник: TAdviser; Autonews; РБК; Минпромторг России; Кубанские новости; Ведомости. Юг</a:t>
+              <a:t>Источник: Автостат; TAdviser; За рулём; Минпромторг России; Кубанские новости; Деловая газета. Юг</a:t>
             </a:r>
           </a:p>
         </p:txBody>
@@ -20797,7 +20797,7 @@
                 <a:ea typeface="Calibri"/>
                 <a:cs typeface="Calibri"/>
               </a:rPr>
-              <a:t>Доля в продажах новых легковых автомобилей, Россия, 2026, </a:t>
+              <a:t>Доля в продажах новых легковых автомобилей, Россия, январь–июль, </a:t>
             </a:r>
             <a:r>
               <a:rPr sz="1100" b="1" i="0">
@@ -20856,8 +20856,8 @@
         </p:nvSpPr>
         <p:spPr>
           <a:xfrm>
-            <a:off x="777240" y="3834079"/>
-            <a:ext cx="960120" cy="189280"/>
+            <a:off x="777240" y="3813048"/>
+            <a:ext cx="960120" cy="210311"/>
           </a:xfrm>
           <a:prstGeom prst="rect">
             <a:avLst/>
@@ -20900,7 +20900,7 @@
         </p:nvSpPr>
         <p:spPr>
           <a:xfrm>
-            <a:off x="411480" y="3596335"/>
+            <a:off x="411480" y="3575304"/>
             <a:ext cx="1691639" cy="201168"/>
           </a:xfrm>
           <a:prstGeom prst="rect">
@@ -20975,8 +20975,8 @@
                 <a:ea typeface="Calibri"/>
                 <a:cs typeface="Calibri"/>
               </a:rPr>
-              <a:t>Электромобили,
-Россия</a:t>
+              <a:t>Чистые
+электромобили, 2026</a:t>
             </a:r>
           </a:p>
         </p:txBody>
@@ -20989,14 +20989,14 @@
         </p:nvSpPr>
         <p:spPr>
           <a:xfrm>
-            <a:off x="2468880" y="2971800"/>
-            <a:ext cx="960120" cy="1051560"/>
+            <a:off x="2468880" y="2854960"/>
+            <a:ext cx="960120" cy="1168400"/>
           </a:xfrm>
           <a:prstGeom prst="rect">
             <a:avLst/>
           </a:prstGeom>
           <a:solidFill>
-            <a:srgbClr val="07738D"/>
+            <a:srgbClr val="86E1F9"/>
           </a:solidFill>
           <a:ln>
             <a:noFill/>
@@ -21033,7 +21033,7 @@
         </p:nvSpPr>
         <p:spPr>
           <a:xfrm>
-            <a:off x="2103120" y="2734056"/>
+            <a:off x="2103120" y="2617216"/>
             <a:ext cx="1691639" cy="201168"/>
           </a:xfrm>
           <a:prstGeom prst="rect">
@@ -21109,7 +21109,7 @@
                 <a:cs typeface="Calibri"/>
               </a:rPr>
               <a:t>Электромобили
-и гибриды, Россия</a:t>
+и гибриды, 2025</a:t>
             </a:r>
           </a:p>
         </p:txBody>
@@ -21129,7 +21129,7 @@
             <a:avLst/>
           </a:prstGeom>
           <a:solidFill>
-            <a:srgbClr val="043D4A"/>
+            <a:srgbClr val="07738D"/>
           </a:solidFill>
           <a:ln>
             <a:noFill/>
@@ -21197,7 +21197,7 @@
                 <a:ea typeface="Calibri"/>
                 <a:cs typeface="Calibri"/>
               </a:rPr>
-              <a:t>10,0%</a:t>
+              <a:t>9,0%</a:t>
             </a:r>
           </a:p>
         </p:txBody>
@@ -21242,7 +21242,7 @@
                 <a:cs typeface="Calibri"/>
               </a:rPr>
               <a:t>Электромобили
-и гибриды, Москва</a:t>
+и гибриды, 2026</a:t>
             </a:r>
           </a:p>
         </p:txBody>
@@ -21286,7 +21286,7 @@
                 <a:ea typeface="Calibri"/>
                 <a:cs typeface="Calibri"/>
               </a:rPr>
-              <a:t>Тренд реален, но база низкая</a:t>
+              <a:t>Тренд реален, но чистых электромобилей всё ещё меньше 1%</a:t>
             </a:r>
           </a:p>
         </p:txBody>
@@ -21370,7 +21370,7 @@
                 <a:ea typeface="Calibri"/>
                 <a:cs typeface="Calibri"/>
               </a:rPr>
-              <a:t>Парк электромобилей в России — 164 тыс. штук, рост на 35% за год</a:t>
+              <a:t>Парк электромобилей в России — 164 тыс. штук на конец 2025 г., рост на 35% за год</a:t>
             </a:r>
           </a:p>
           <a:p>
@@ -21396,7 +21396,7 @@
                 <a:ea typeface="Calibri"/>
                 <a:cs typeface="Calibri"/>
               </a:rPr>
-              <a:t>Новых электромобилей за январь–июль 2026 г. продано 3 178 штук, на 20% больше, чем годом ранее</a:t>
+              <a:t>Гибридов и электромобилей за январь–июль 2026 г. продано 70,2 тыс. штук, рост на 94,7%; чистых электромобилей из них всего 7 025 штук (+15,3%)</a:t>
             </a:r>
           </a:p>
           <a:p>
@@ -21422,7 +21422,7 @@
                 <a:ea typeface="Calibri"/>
                 <a:cs typeface="Calibri"/>
               </a:rPr>
-              <a:t>Доля российских моделей в сегменте выросла до 50% против 20% годом ранее; Evolute — 35% всех продаж электромобилей</a:t>
+              <a:t>Доля российских моделей в сегменте — 45,8%; Evolute — первый бренд среди чистых электромобилей</a:t>
             </a:r>
           </a:p>
           <a:p>
@@ -21448,7 +21448,7 @@
                 <a:ea typeface="Calibri"/>
                 <a:cs typeface="Calibri"/>
               </a:rPr>
-              <a:t>Вывод для собственника: популярность растёт, но сама по себе решения не обосновывает — считать нужно юнит-экономику парка</a:t>
+              <a:t>Вывод для собственника: рост идёт в основном за счёт гибридов, а решение по парку считается юнит-экономикой, а не долей рынка</a:t>
             </a:r>
           </a:p>
         </p:txBody>
@@ -21810,7 +21810,7 @@
                 <a:ea typeface="Calibri"/>
                 <a:cs typeface="Calibri"/>
               </a:rPr>
-              <a:t>503 зарядные станции — 4-е место в России, +14% за год; +50 станций в 2026 г.; станции работают в 36 муниципалитетах, включая Сочи</a:t>
+              <a:t>503 зарядные станции — 4-е место в России, +14% за год, +50 станций в 2026 г.; в самом Сочи — 36 станций</a:t>
             </a:r>
           </a:p>
         </p:txBody>
@@ -21925,7 +21925,7 @@
                 <a:ea typeface="Calibri"/>
                 <a:cs typeface="Calibri"/>
               </a:rPr>
-              <a:t>Весь парк перевести нельзя — не хватит мощности сети; но пилот на 20 машин окупается за 16 месяцев</a:t>
+              <a:t>Весь парк перевести нельзя — не хватит мощности сети; но пилот на 20 машин окупается за 17 месяцев</a:t>
             </a:r>
           </a:p>
         </p:txBody>
@@ -21962,7 +21962,7 @@
                 <a:ea typeface="Calibri"/>
                 <a:cs typeface="Calibri"/>
               </a:rPr>
-              <a:t>Источник: Минпромторг России; АвтоВАЗ; Evolute; Petrol Plus; Auto.ru; Россети Кубань; расчёт рабочей группы</a:t>
+              <a:t>Источник: Минпромторг России; АвтоВАЗ; Evolute; Driff; Росстат; Auto.ru; Кубанские новости; 93.ru; расчёт рабочей группы</a:t>
             </a:r>
           </a:p>
         </p:txBody>
@@ -22236,7 +22236,7 @@
                 <a:ea typeface="Calibri"/>
                 <a:cs typeface="Calibri"/>
               </a:rPr>
-              <a:t>1. Выгодно: 531 тыс. ₽ на автомобиль за 3 года</a:t>
+              <a:t>1. Выгодно: 480 тыс. ₽ на автомобиль за 3 года</a:t>
             </a:r>
           </a:p>
         </p:txBody>
@@ -22331,7 +22331,7 @@
                 <a:ea typeface="Calibri"/>
                 <a:cs typeface="Calibri"/>
               </a:rPr>
-              <a:t>531 тыс. ₽</a:t>
+              <a:t>480 тыс. ₽</a:t>
             </a:r>
             <a:r>
               <a:rPr sz="1050" b="0" i="0">
@@ -22379,7 +22379,7 @@
                 <a:ea typeface="Calibri"/>
                 <a:cs typeface="Calibri"/>
               </a:rPr>
-              <a:t>3,5 ₽ на километре</a:t>
+              <a:t>3,3 ₽ на километре</a:t>
             </a:r>
             <a:r>
               <a:rPr sz="1050" b="0" i="0">
@@ -22390,7 +22390,7 @@
                 <a:ea typeface="Calibri"/>
                 <a:cs typeface="Calibri"/>
               </a:rPr>
-              <a:t>: 4,4 ₽/км против 7,9 ₽/км у Lada Vesta</a:t>
+              <a:t>: 4,4 ₽/км против 7,7 ₽/км у Lada Vesta</a:t>
             </a:r>
           </a:p>
           <a:p>
@@ -22427,7 +22427,7 @@
                 <a:ea typeface="Calibri"/>
                 <a:cs typeface="Calibri"/>
               </a:rPr>
-              <a:t>120 тыс. км — это 16 месяцев</a:t>
+              <a:t>126 тыс. км — это 17 месяцев</a:t>
             </a:r>
             <a:r>
               <a:rPr sz="1050" b="0" i="0">
@@ -22475,7 +22475,7 @@
                 <a:ea typeface="Calibri"/>
                 <a:cs typeface="Calibri"/>
               </a:rPr>
-              <a:t>10,6 млн ₽ за три года</a:t>
+              <a:t>9,6 млн ₽ за три года</a:t>
             </a:r>
             <a:r>
               <a:rPr sz="1050" b="0" i="0">
@@ -22930,7 +22930,7 @@
                 <a:ea typeface="Calibri"/>
                 <a:cs typeface="Calibri"/>
               </a:rPr>
-              <a:t>теряет 394 тыс. ₽</a:t>
+              <a:t>теряет 445 тыс. ₽</a:t>
             </a:r>
             <a:r>
               <a:rPr sz="1050" b="0" i="0">
@@ -23314,7 +23314,7 @@
                 <a:ea typeface="Calibri"/>
                 <a:cs typeface="Calibri"/>
               </a:rPr>
-              <a:t>+10,6 млн ₽</a:t>
+              <a:t>+9,6 млн ₽</a:t>
             </a:r>
           </a:p>
           <a:p>
@@ -24675,7 +24675,7 @@
                 <a:ea typeface="Calibri"/>
                 <a:cs typeface="Calibri"/>
               </a:rPr>
-              <a:t>4,4 против 7,9 ₽/км — экономия 3,5 ₽/км</a:t>
+              <a:t>4,4 против 7,7 ₽/км — экономия 3,3 ₽/км</a:t>
             </a:r>
           </a:p>
         </p:txBody>
@@ -24837,7 +24837,7 @@
                 <a:ea typeface="Calibri"/>
                 <a:cs typeface="Calibri"/>
               </a:rPr>
-              <a:t>+213 тыс. ₽ с субсидией, +1 138 тыс. ₽ без неё</a:t>
+              <a:t>+212 тыс. ₽ с субсидией, +1 138 тыс. ₽ без неё</a:t>
             </a:r>
           </a:p>
         </p:txBody>
@@ -26303,7 +26303,7 @@
                 <a:ea typeface="Calibri"/>
                 <a:cs typeface="Calibri"/>
               </a:rPr>
-              <a:t>Топливо +20% поднимает выгоду до 885 тыс. ₽</a:t>
+              <a:t>Топливо +20% поднимает выгоду до 824 тыс. ₽</a:t>
             </a:r>
           </a:p>
         </p:txBody>
@@ -26525,7 +26525,7 @@
                 <a:ea typeface="Calibri"/>
                 <a:cs typeface="Calibri"/>
               </a:rPr>
-              <a:t>За 3 года электромобиль дешевле на 531 тыс. ₽, но 925 тыс. ₽ из этой выгоды даёт субсидия государства</a:t>
+              <a:t>За 3 года электромобиль дешевле на 480 тыс. ₽, но 925 тыс. ₽ из этой выгоды даёт субсидия государства</a:t>
             </a:r>
           </a:p>
         </p:txBody>
@@ -26599,7 +26599,7 @@
                 <a:ea typeface="Calibri"/>
                 <a:cs typeface="Calibri"/>
               </a:rPr>
-              <a:t>Источник: АвтоВАЗ; Evolute; Petrol Plus; Auto.ru; Минпромторг России; Lenta.ru; расчёт рабочей группы</a:t>
+              <a:t>Источник: АвтоВАЗ; Evolute; Driff; Росстат; Auto.ru; Минпромторг России; Lenta.ru; расчёт рабочей группы</a:t>
             </a:r>
           </a:p>
         </p:txBody>
@@ -26760,7 +26760,7 @@
                 <a:ea typeface="Calibri"/>
                 <a:cs typeface="Calibri"/>
               </a:rPr>
-              <a:t>3 157</a:t>
+              <a:t>3 106</a:t>
             </a:r>
           </a:p>
         </p:txBody>
@@ -26804,7 +26804,7 @@
                 <a:ea typeface="Calibri"/>
                 <a:cs typeface="Calibri"/>
               </a:rPr>
-              <a:t>2 626</a:t>
+              <a:t>2 626</a:t>
             </a:r>
           </a:p>
         </p:txBody>
@@ -26848,7 +26848,7 @@
                 <a:ea typeface="Calibri"/>
                 <a:cs typeface="Calibri"/>
               </a:rPr>
-              <a:t>−531 к ДВС</a:t>
+              <a:t>−480 к ДВС</a:t>
             </a:r>
           </a:p>
         </p:txBody>
@@ -26892,7 +26892,7 @@
                 <a:ea typeface="Calibri"/>
                 <a:cs typeface="Calibri"/>
               </a:rPr>
-              <a:t>3 551</a:t>
+              <a:t>3 550</a:t>
             </a:r>
           </a:p>
         </p:txBody>
@@ -26936,7 +26936,7 @@
                 <a:ea typeface="Calibri"/>
                 <a:cs typeface="Calibri"/>
               </a:rPr>
-              <a:t>+394 к ДВС</a:t>
+              <a:t>+445 к ДВС</a:t>
             </a:r>
           </a:p>
         </p:txBody>
@@ -27869,7 +27869,7 @@
                 <a:ea typeface="Calibri"/>
                 <a:cs typeface="Calibri"/>
               </a:rPr>
-              <a:t>3,5 ₽/км</a:t>
+              <a:t>3,3 ₽/км</a:t>
             </a:r>
             <a:r>
               <a:rPr sz="1050" b="0" i="0">
@@ -27880,7 +27880,7 @@
                 <a:ea typeface="Calibri"/>
                 <a:cs typeface="Calibri"/>
               </a:rPr>
-              <a:t>: 4,4 ₽/км у электромобиля против 7,9 ₽/км у ДВС (энергия, ТО и простой на зарядку)</a:t>
+              <a:t>: 4,4 ₽/км у электромобиля против 7,7 ₽/км у ДВС (энергия, ТО и простой на зарядку)</a:t>
             </a:r>
           </a:p>
           <a:p>
@@ -27939,7 +27939,7 @@
                 <a:ea typeface="Calibri"/>
                 <a:cs typeface="Calibri"/>
               </a:rPr>
-              <a:t>1 347 тыс. ₽</a:t>
+              <a:t>1 347 тыс. ₽</a:t>
             </a:r>
             <a:r>
               <a:rPr sz="1050" b="0" i="0">
@@ -27987,7 +27987,7 @@
                 <a:ea typeface="Calibri"/>
                 <a:cs typeface="Calibri"/>
               </a:rPr>
-              <a:t>120 тыс. км (16 мес.)</a:t>
+              <a:t>126 тыс. км (17 мес.)</a:t>
             </a:r>
             <a:r>
               <a:rPr sz="1050" b="0" i="0">
@@ -28009,7 +28009,7 @@
                 <a:ea typeface="Calibri"/>
                 <a:cs typeface="Calibri"/>
               </a:rPr>
-              <a:t>381 тыс. км (51 мес.)</a:t>
+              <a:t>403 тыс. км (54 мес.)</a:t>
             </a:r>
             <a:r>
               <a:rPr sz="1050" b="0" i="0">
@@ -28117,7 +28117,7 @@
                 <a:ea typeface="Calibri"/>
                 <a:cs typeface="Calibri"/>
               </a:rPr>
-              <a:t>Источник: Россети Кубань; Кубанские новости; Ведомости. Юг; Evolute; расчёт рабочей группы</a:t>
+              <a:t>Источник: Кубанские новости; Деловая газета. Юг; 93.ru; Evolute; расчёт рабочей группы</a:t>
             </a:r>
           </a:p>
         </p:txBody>
@@ -30068,7 +30068,7 @@
                 <a:ea typeface="Calibri"/>
                 <a:cs typeface="Calibri"/>
               </a:rPr>
-              <a:t>503 станции в Краснодарском крае (4-е место в России, +14% за год), но они рассчитаны на частных владельцев; летом в пик — очереди</a:t>
+              <a:t>в Краснодарском крае 503 станции (4-е место в России, +14% за год), но в самом Сочи их 36 — и рассчитаны они на частных владельцев, а не на парк</a:t>
             </a:r>
           </a:p>
         </p:txBody>
@@ -30165,7 +30165,7 @@
                 <a:ea typeface="Calibri"/>
                 <a:cs typeface="Calibri"/>
               </a:rPr>
-              <a:t>Источник: Минпромторг России; Evolute; Lenta.ru; Petrol Plus; расчёт рабочей группы</a:t>
+              <a:t>Источник: Минпромторг России; Evolute; Lenta.ru; Driff; расчёт рабочей группы</a:t>
             </a:r>
           </a:p>
         </p:txBody>
@@ -30726,7 +30726,7 @@
                 <a:ea typeface="Calibri"/>
                 <a:cs typeface="Calibri"/>
               </a:rPr>
-              <a:t>Программа льготного лизинга продлевается ежегодно; без неё проект теряет 394 тыс. ₽ на автомобиль</a:t>
+              <a:t>Программа льготного лизинга продлевается ежегодно; без неё проект теряет 445 тыс. ₽ на автомобиль</a:t>
             </a:r>
           </a:p>
         </p:txBody>
@@ -32977,7 +32977,7 @@
                 <a:ea typeface="Calibri"/>
                 <a:cs typeface="Calibri"/>
               </a:rPr>
-              <a:t>Экономия за 3 года: 531 тыс. ₽ × 20 автомобилей</a:t>
+              <a:t>Экономия за 3 года: 480 тыс. ₽ × 20 автомобилей</a:t>
             </a:r>
           </a:p>
         </p:txBody>
@@ -33039,7 +33039,7 @@
                 <a:ea typeface="Calibri"/>
                 <a:cs typeface="Calibri"/>
               </a:rPr>
-              <a:t>+10,6 млн ₽</a:t>
+              <a:t>+9,6 млн ₽</a:t>
             </a:r>
           </a:p>
         </p:txBody>
@@ -34405,7 +34405,7 @@
                 <a:ea typeface="Calibri"/>
                 <a:cs typeface="Calibri"/>
               </a:rPr>
-              <a:t>Источник: АвтоВАЗ; Evolute; Petrol Plus; Auto.ru; Минпромторг России; Lenta.ru; ТАСС; расчёт рабочей группы</a:t>
+              <a:t>Источник: АвтоВАЗ; Evolute; Driff; Росстат; Auto.ru; Минпромторг России; Lenta.ru; ТАСС; расчёт рабочей группы</a:t>
             </a:r>
           </a:p>
         </p:txBody>
@@ -34821,7 +34821,7 @@
                 <a:ea typeface="Calibri"/>
                 <a:cs typeface="Calibri"/>
               </a:rPr>
-              <a:t>1 580 тыс. ₽</a:t>
+              <a:t>1 580 тыс. ₽</a:t>
             </a:r>
           </a:p>
         </p:txBody>
@@ -34883,7 +34883,7 @@
                 <a:ea typeface="Calibri"/>
                 <a:cs typeface="Calibri"/>
               </a:rPr>
-              <a:t>2 775 тыс. ₽ (1 850 после субсидии)</a:t>
+              <a:t>2 775 тыс. ₽ (1 850 после субсидии)</a:t>
             </a:r>
           </a:p>
         </p:txBody>
@@ -35670,7 +35670,7 @@
                 <a:ea typeface="Calibri"/>
                 <a:cs typeface="Calibri"/>
               </a:rPr>
-              <a:t>69 ₽/л, АИ-92</a:t>
+              <a:t>67 ₽/л, АИ-92</a:t>
             </a:r>
           </a:p>
         </p:txBody>
@@ -35794,7 +35794,7 @@
                 <a:ea typeface="Calibri"/>
                 <a:cs typeface="Calibri"/>
               </a:rPr>
-              <a:t>Petrol Plus (АИ-95 в Сочи 78,8 ₽/л, август 2026) — факт; ЭМ: 60% свой пост по 10 ₽ и 40% публичная ЭЗС по 20 ₽ — оценка</a:t>
+              <a:t>Driff, Росстат: средняя по Сочи 67 ₽/л, разброс по АЗС 65–73 ₽/л, лето 2026 — факт; ЭМ: 60% свой пост по 10 ₽ и 40% публичная ЭЗС по 20 ₽ — оценка</a:t>
             </a:r>
           </a:p>
         </p:txBody>
@@ -37085,7 +37085,7 @@
                 <a:ea typeface="Calibri"/>
                 <a:cs typeface="Calibri"/>
               </a:rPr>
-              <a:t>2 160 тыс. ₽/год</a:t>
+              <a:t>2 160 тыс. ₽/год</a:t>
             </a:r>
           </a:p>
         </p:txBody>
@@ -37147,7 +37147,7 @@
                 <a:ea typeface="Calibri"/>
                 <a:cs typeface="Calibri"/>
               </a:rPr>
-              <a:t>2 160 тыс. ₽/год</a:t>
+              <a:t>2 160 тыс. ₽/год</a:t>
             </a:r>
           </a:p>
         </p:txBody>

--- a/taxi-ev-sochi/output/Электромобили_в_таксопарке_Сочи.pptx
+++ b/taxi-ev-sochi/output/Электромобили_в_таксопарке_Сочи.pptx
@@ -23074,7 +23074,7 @@
                 <a:ea typeface="Calibri"/>
                 <a:cs typeface="Calibri"/>
               </a:rPr>
-              <a:t>заводская кончится на 13-м месяце</a:t>
+              <a:t>заводских 150 тыс. км хватит на 20 месяцев из 36</a:t>
             </a:r>
             <a:r>
               <a:rPr sz="1050" b="0" i="0">
@@ -23098,7 +23098,7 @@
         </p:nvSpPr>
         <p:spPr>
           <a:xfrm>
-            <a:off x="338328" y="4498848"/>
+            <a:off x="338328" y="4462272"/>
             <a:ext cx="11521440" cy="219456"/>
           </a:xfrm>
           <a:prstGeom prst="rect">
@@ -23142,7 +23142,7 @@
         </p:nvCxnSpPr>
         <p:spPr>
           <a:xfrm>
-            <a:off x="338328" y="4736592"/>
+            <a:off x="338328" y="4700016"/>
             <a:ext cx="11521440" cy="0"/>
           </a:xfrm>
           <a:prstGeom prst="line">
@@ -23177,8 +23177,8 @@
         </p:nvSpPr>
         <p:spPr>
           <a:xfrm>
-            <a:off x="338328" y="4864608"/>
-            <a:ext cx="2743200" cy="1234440"/>
+            <a:off x="338328" y="4791456"/>
+            <a:ext cx="2743200" cy="877824"/>
           </a:xfrm>
           <a:prstGeom prst="roundRect">
             <a:avLst>
@@ -23263,8 +23263,8 @@
         </p:nvSpPr>
         <p:spPr>
           <a:xfrm>
-            <a:off x="3264408" y="4864608"/>
-            <a:ext cx="2743200" cy="1234440"/>
+            <a:off x="3264408" y="4791456"/>
+            <a:ext cx="2743200" cy="877824"/>
           </a:xfrm>
           <a:prstGeom prst="roundRect">
             <a:avLst>
@@ -23349,8 +23349,8 @@
         </p:nvSpPr>
         <p:spPr>
           <a:xfrm>
-            <a:off x="6190488" y="4864608"/>
-            <a:ext cx="2743200" cy="1234440"/>
+            <a:off x="6190488" y="4791456"/>
+            <a:ext cx="2743200" cy="877824"/>
           </a:xfrm>
           <a:prstGeom prst="roundRect">
             <a:avLst>
@@ -23435,8 +23435,8 @@
         </p:nvSpPr>
         <p:spPr>
           <a:xfrm>
-            <a:off x="9116568" y="4864608"/>
-            <a:ext cx="2743200" cy="1234440"/>
+            <a:off x="9116568" y="4791456"/>
+            <a:ext cx="2743200" cy="877824"/>
           </a:xfrm>
           <a:prstGeom prst="roundRect">
             <a:avLst>
@@ -26465,7 +26465,7 @@
                 <a:ea typeface="Calibri"/>
                 <a:cs typeface="Calibri"/>
               </a:rPr>
-              <a:t>Гарантия на батарею втрое короче пробега такси</a:t>
+              <a:t>Гарантия на батарею 150 тыс. км против пробега 270 тыс. км</a:t>
             </a:r>
           </a:p>
         </p:txBody>
@@ -30947,7 +30947,7 @@
                 <a:ea typeface="Calibri"/>
                 <a:cs typeface="Calibri"/>
               </a:rPr>
-              <a:t>Гарантия — 3 года или 100 тыс. км, а такси проезжает 270 тыс. км за те же 3 года: гарантия кончится на 13-м месяце</a:t>
+              <a:t>Гарантия на батарею — 8 лет или 150 тыс. км, но такси проезжает 270 тыс. км за 3 года: последние 120 тыс. км — без гарантии на самый дорогой узел (общая гарантия на автомобиль — 100 тыс. км, это 13 месяцев)</a:t>
             </a:r>
           </a:p>
         </p:txBody>
@@ -34711,7 +34711,7 @@
         <p:spPr>
           <a:xfrm>
             <a:off x="338328" y="1490472"/>
-            <a:ext cx="2765145" cy="484632"/>
+            <a:ext cx="2765145" cy="466344"/>
           </a:xfrm>
           <a:prstGeom prst="rect">
             <a:avLst/>
@@ -34773,7 +34773,7 @@
         <p:spPr>
           <a:xfrm>
             <a:off x="3103473" y="1490472"/>
-            <a:ext cx="2189073" cy="484632"/>
+            <a:ext cx="2189073" cy="466344"/>
           </a:xfrm>
           <a:prstGeom prst="rect">
             <a:avLst/>
@@ -34835,7 +34835,7 @@
         <p:spPr>
           <a:xfrm>
             <a:off x="5292547" y="1490472"/>
-            <a:ext cx="2534716" cy="484632"/>
+            <a:ext cx="2534716" cy="466344"/>
           </a:xfrm>
           <a:prstGeom prst="rect">
             <a:avLst/>
@@ -34897,7 +34897,7 @@
         <p:spPr>
           <a:xfrm>
             <a:off x="7827264" y="1490472"/>
-            <a:ext cx="4032504" cy="484632"/>
+            <a:ext cx="4032504" cy="466344"/>
           </a:xfrm>
           <a:prstGeom prst="rect">
             <a:avLst/>
@@ -34958,7 +34958,7 @@
         </p:nvCxnSpPr>
         <p:spPr>
           <a:xfrm>
-            <a:off x="338328" y="1975104"/>
+            <a:off x="338328" y="1956816"/>
             <a:ext cx="11521440" cy="0"/>
           </a:xfrm>
           <a:prstGeom prst="line">
@@ -34993,8 +34993,8 @@
         </p:nvSpPr>
         <p:spPr>
           <a:xfrm>
-            <a:off x="338328" y="1975104"/>
-            <a:ext cx="2765145" cy="484632"/>
+            <a:off x="338328" y="1956816"/>
+            <a:ext cx="2765145" cy="466344"/>
           </a:xfrm>
           <a:prstGeom prst="rect">
             <a:avLst/>
@@ -35055,8 +35055,8 @@
         </p:nvSpPr>
         <p:spPr>
           <a:xfrm>
-            <a:off x="3103473" y="1975104"/>
-            <a:ext cx="2189073" cy="484632"/>
+            <a:off x="3103473" y="1956816"/>
+            <a:ext cx="2189073" cy="466344"/>
           </a:xfrm>
           <a:prstGeom prst="rect">
             <a:avLst/>
@@ -35117,8 +35117,8 @@
         </p:nvSpPr>
         <p:spPr>
           <a:xfrm>
-            <a:off x="5292547" y="1975104"/>
-            <a:ext cx="2534716" cy="484632"/>
+            <a:off x="5292547" y="1956816"/>
+            <a:ext cx="2534716" cy="466344"/>
           </a:xfrm>
           <a:prstGeom prst="rect">
             <a:avLst/>
@@ -35179,8 +35179,8 @@
         </p:nvSpPr>
         <p:spPr>
           <a:xfrm>
-            <a:off x="7827264" y="1975104"/>
-            <a:ext cx="4032504" cy="484632"/>
+            <a:off x="7827264" y="1956816"/>
+            <a:ext cx="4032504" cy="466344"/>
           </a:xfrm>
           <a:prstGeom prst="rect">
             <a:avLst/>
@@ -35241,7 +35241,7 @@
         </p:nvCxnSpPr>
         <p:spPr>
           <a:xfrm>
-            <a:off x="338328" y="2459736"/>
+            <a:off x="338328" y="2423160"/>
             <a:ext cx="11521440" cy="0"/>
           </a:xfrm>
           <a:prstGeom prst="line">
@@ -35276,8 +35276,8 @@
         </p:nvSpPr>
         <p:spPr>
           <a:xfrm>
-            <a:off x="338328" y="2459736"/>
-            <a:ext cx="2765145" cy="484632"/>
+            <a:off x="338328" y="2423160"/>
+            <a:ext cx="2765145" cy="466344"/>
           </a:xfrm>
           <a:prstGeom prst="rect">
             <a:avLst/>
@@ -35338,8 +35338,8 @@
         </p:nvSpPr>
         <p:spPr>
           <a:xfrm>
-            <a:off x="3103473" y="2459736"/>
-            <a:ext cx="2189073" cy="484632"/>
+            <a:off x="3103473" y="2423160"/>
+            <a:ext cx="2189073" cy="466344"/>
           </a:xfrm>
           <a:prstGeom prst="rect">
             <a:avLst/>
@@ -35400,8 +35400,8 @@
         </p:nvSpPr>
         <p:spPr>
           <a:xfrm>
-            <a:off x="5292547" y="2459736"/>
-            <a:ext cx="2534716" cy="484632"/>
+            <a:off x="5292547" y="2423160"/>
+            <a:ext cx="2534716" cy="466344"/>
           </a:xfrm>
           <a:prstGeom prst="rect">
             <a:avLst/>
@@ -35462,8 +35462,8 @@
         </p:nvSpPr>
         <p:spPr>
           <a:xfrm>
-            <a:off x="7827264" y="2459736"/>
-            <a:ext cx="4032504" cy="484632"/>
+            <a:off x="7827264" y="2423160"/>
+            <a:ext cx="4032504" cy="466344"/>
           </a:xfrm>
           <a:prstGeom prst="rect">
             <a:avLst/>
@@ -35524,7 +35524,7 @@
         </p:nvCxnSpPr>
         <p:spPr>
           <a:xfrm>
-            <a:off x="338328" y="2944368"/>
+            <a:off x="338328" y="2889504"/>
             <a:ext cx="11521440" cy="0"/>
           </a:xfrm>
           <a:prstGeom prst="line">
@@ -35559,8 +35559,8 @@
         </p:nvSpPr>
         <p:spPr>
           <a:xfrm>
-            <a:off x="338328" y="2944368"/>
-            <a:ext cx="2765145" cy="484632"/>
+            <a:off x="338328" y="2889504"/>
+            <a:ext cx="2765145" cy="466344"/>
           </a:xfrm>
           <a:prstGeom prst="rect">
             <a:avLst/>
@@ -35621,8 +35621,8 @@
         </p:nvSpPr>
         <p:spPr>
           <a:xfrm>
-            <a:off x="3103473" y="2944368"/>
-            <a:ext cx="2189073" cy="484632"/>
+            <a:off x="3103473" y="2889504"/>
+            <a:ext cx="2189073" cy="466344"/>
           </a:xfrm>
           <a:prstGeom prst="rect">
             <a:avLst/>
@@ -35683,8 +35683,8 @@
         </p:nvSpPr>
         <p:spPr>
           <a:xfrm>
-            <a:off x="5292547" y="2944368"/>
-            <a:ext cx="2534716" cy="484632"/>
+            <a:off x="5292547" y="2889504"/>
+            <a:ext cx="2534716" cy="466344"/>
           </a:xfrm>
           <a:prstGeom prst="rect">
             <a:avLst/>
@@ -35745,8 +35745,8 @@
         </p:nvSpPr>
         <p:spPr>
           <a:xfrm>
-            <a:off x="7827264" y="2944368"/>
-            <a:ext cx="4032504" cy="484632"/>
+            <a:off x="7827264" y="2889504"/>
+            <a:ext cx="4032504" cy="466344"/>
           </a:xfrm>
           <a:prstGeom prst="rect">
             <a:avLst/>
@@ -35807,7 +35807,7 @@
         </p:nvCxnSpPr>
         <p:spPr>
           <a:xfrm>
-            <a:off x="338328" y="3429000"/>
+            <a:off x="338328" y="3355848"/>
             <a:ext cx="11521440" cy="0"/>
           </a:xfrm>
           <a:prstGeom prst="line">
@@ -35842,8 +35842,8 @@
         </p:nvSpPr>
         <p:spPr>
           <a:xfrm>
-            <a:off x="338328" y="3429000"/>
-            <a:ext cx="2765145" cy="484632"/>
+            <a:off x="338328" y="3355848"/>
+            <a:ext cx="2765145" cy="466344"/>
           </a:xfrm>
           <a:prstGeom prst="rect">
             <a:avLst/>
@@ -35904,8 +35904,8 @@
         </p:nvSpPr>
         <p:spPr>
           <a:xfrm>
-            <a:off x="3103473" y="3429000"/>
-            <a:ext cx="2189073" cy="484632"/>
+            <a:off x="3103473" y="3355848"/>
+            <a:ext cx="2189073" cy="466344"/>
           </a:xfrm>
           <a:prstGeom prst="rect">
             <a:avLst/>
@@ -35966,8 +35966,8 @@
         </p:nvSpPr>
         <p:spPr>
           <a:xfrm>
-            <a:off x="5292547" y="3429000"/>
-            <a:ext cx="2534716" cy="484632"/>
+            <a:off x="5292547" y="3355848"/>
+            <a:ext cx="2534716" cy="466344"/>
           </a:xfrm>
           <a:prstGeom prst="rect">
             <a:avLst/>
@@ -36028,8 +36028,8 @@
         </p:nvSpPr>
         <p:spPr>
           <a:xfrm>
-            <a:off x="7827264" y="3429000"/>
-            <a:ext cx="4032504" cy="484632"/>
+            <a:off x="7827264" y="3355848"/>
+            <a:ext cx="4032504" cy="466344"/>
           </a:xfrm>
           <a:prstGeom prst="rect">
             <a:avLst/>
@@ -36090,7 +36090,7 @@
         </p:nvCxnSpPr>
         <p:spPr>
           <a:xfrm>
-            <a:off x="338328" y="3913632"/>
+            <a:off x="338328" y="3822191"/>
             <a:ext cx="11521440" cy="0"/>
           </a:xfrm>
           <a:prstGeom prst="line">
@@ -36125,8 +36125,8 @@
         </p:nvSpPr>
         <p:spPr>
           <a:xfrm>
-            <a:off x="338328" y="3913632"/>
-            <a:ext cx="2765145" cy="484632"/>
+            <a:off x="338328" y="3822191"/>
+            <a:ext cx="2765145" cy="466344"/>
           </a:xfrm>
           <a:prstGeom prst="rect">
             <a:avLst/>
@@ -36187,8 +36187,8 @@
         </p:nvSpPr>
         <p:spPr>
           <a:xfrm>
-            <a:off x="3103473" y="3913632"/>
-            <a:ext cx="2189073" cy="484632"/>
+            <a:off x="3103473" y="3822191"/>
+            <a:ext cx="2189073" cy="466344"/>
           </a:xfrm>
           <a:prstGeom prst="rect">
             <a:avLst/>
@@ -36249,8 +36249,8 @@
         </p:nvSpPr>
         <p:spPr>
           <a:xfrm>
-            <a:off x="5292547" y="3913632"/>
-            <a:ext cx="2534716" cy="484632"/>
+            <a:off x="5292547" y="3822191"/>
+            <a:ext cx="2534716" cy="466344"/>
           </a:xfrm>
           <a:prstGeom prst="rect">
             <a:avLst/>
@@ -36311,8 +36311,8 @@
         </p:nvSpPr>
         <p:spPr>
           <a:xfrm>
-            <a:off x="7827264" y="3913632"/>
-            <a:ext cx="4032504" cy="484632"/>
+            <a:off x="7827264" y="3822191"/>
+            <a:ext cx="4032504" cy="466344"/>
           </a:xfrm>
           <a:prstGeom prst="rect">
             <a:avLst/>
@@ -36373,7 +36373,7 @@
         </p:nvCxnSpPr>
         <p:spPr>
           <a:xfrm>
-            <a:off x="338328" y="4398264"/>
+            <a:off x="338328" y="4288536"/>
             <a:ext cx="11521440" cy="0"/>
           </a:xfrm>
           <a:prstGeom prst="line">
@@ -36408,8 +36408,8 @@
         </p:nvSpPr>
         <p:spPr>
           <a:xfrm>
-            <a:off x="338328" y="4398264"/>
-            <a:ext cx="2765145" cy="484632"/>
+            <a:off x="338328" y="4288536"/>
+            <a:ext cx="2765145" cy="466344"/>
           </a:xfrm>
           <a:prstGeom prst="rect">
             <a:avLst/>
@@ -36470,8 +36470,8 @@
         </p:nvSpPr>
         <p:spPr>
           <a:xfrm>
-            <a:off x="3103473" y="4398264"/>
-            <a:ext cx="2189073" cy="484632"/>
+            <a:off x="3103473" y="4288536"/>
+            <a:ext cx="2189073" cy="466344"/>
           </a:xfrm>
           <a:prstGeom prst="rect">
             <a:avLst/>
@@ -36532,8 +36532,8 @@
         </p:nvSpPr>
         <p:spPr>
           <a:xfrm>
-            <a:off x="5292547" y="4398264"/>
-            <a:ext cx="2534716" cy="484632"/>
+            <a:off x="5292547" y="4288536"/>
+            <a:ext cx="2534716" cy="466344"/>
           </a:xfrm>
           <a:prstGeom prst="rect">
             <a:avLst/>
@@ -36594,8 +36594,8 @@
         </p:nvSpPr>
         <p:spPr>
           <a:xfrm>
-            <a:off x="7827264" y="4398264"/>
-            <a:ext cx="4032504" cy="484632"/>
+            <a:off x="7827264" y="4288536"/>
+            <a:ext cx="4032504" cy="466344"/>
           </a:xfrm>
           <a:prstGeom prst="rect">
             <a:avLst/>
@@ -36656,7 +36656,7 @@
         </p:nvCxnSpPr>
         <p:spPr>
           <a:xfrm>
-            <a:off x="338328" y="4882896"/>
+            <a:off x="338328" y="4754879"/>
             <a:ext cx="11521440" cy="0"/>
           </a:xfrm>
           <a:prstGeom prst="line">
@@ -36691,8 +36691,8 @@
         </p:nvSpPr>
         <p:spPr>
           <a:xfrm>
-            <a:off x="338328" y="4882896"/>
-            <a:ext cx="2765145" cy="484632"/>
+            <a:off x="338328" y="4754879"/>
+            <a:ext cx="2765145" cy="466344"/>
           </a:xfrm>
           <a:prstGeom prst="rect">
             <a:avLst/>
@@ -36753,8 +36753,8 @@
         </p:nvSpPr>
         <p:spPr>
           <a:xfrm>
-            <a:off x="3103473" y="4882896"/>
-            <a:ext cx="2189073" cy="484632"/>
+            <a:off x="3103473" y="4754879"/>
+            <a:ext cx="2189073" cy="466344"/>
           </a:xfrm>
           <a:prstGeom prst="rect">
             <a:avLst/>
@@ -36815,8 +36815,8 @@
         </p:nvSpPr>
         <p:spPr>
           <a:xfrm>
-            <a:off x="5292547" y="4882896"/>
-            <a:ext cx="2534716" cy="484632"/>
+            <a:off x="5292547" y="4754879"/>
+            <a:ext cx="2534716" cy="466344"/>
           </a:xfrm>
           <a:prstGeom prst="rect">
             <a:avLst/>
@@ -36877,8 +36877,8 @@
         </p:nvSpPr>
         <p:spPr>
           <a:xfrm>
-            <a:off x="7827264" y="4882896"/>
-            <a:ext cx="4032504" cy="484632"/>
+            <a:off x="7827264" y="4754879"/>
+            <a:ext cx="4032504" cy="466344"/>
           </a:xfrm>
           <a:prstGeom prst="rect">
             <a:avLst/>
@@ -36939,7 +36939,7 @@
         </p:nvCxnSpPr>
         <p:spPr>
           <a:xfrm>
-            <a:off x="338328" y="5367528"/>
+            <a:off x="338328" y="5221223"/>
             <a:ext cx="11521440" cy="0"/>
           </a:xfrm>
           <a:prstGeom prst="line">
@@ -36974,8 +36974,8 @@
         </p:nvSpPr>
         <p:spPr>
           <a:xfrm>
-            <a:off x="338328" y="5367528"/>
-            <a:ext cx="2765145" cy="484632"/>
+            <a:off x="338328" y="5221223"/>
+            <a:ext cx="2765145" cy="466344"/>
           </a:xfrm>
           <a:prstGeom prst="rect">
             <a:avLst/>
@@ -37036,8 +37036,8 @@
         </p:nvSpPr>
         <p:spPr>
           <a:xfrm>
-            <a:off x="3103473" y="5367528"/>
-            <a:ext cx="2189073" cy="484632"/>
+            <a:off x="3103473" y="5221223"/>
+            <a:ext cx="2189073" cy="466344"/>
           </a:xfrm>
           <a:prstGeom prst="rect">
             <a:avLst/>
@@ -37098,8 +37098,8 @@
         </p:nvSpPr>
         <p:spPr>
           <a:xfrm>
-            <a:off x="5292547" y="5367528"/>
-            <a:ext cx="2534716" cy="484632"/>
+            <a:off x="5292547" y="5221223"/>
+            <a:ext cx="2534716" cy="466344"/>
           </a:xfrm>
           <a:prstGeom prst="rect">
             <a:avLst/>
@@ -37160,8 +37160,8 @@
         </p:nvSpPr>
         <p:spPr>
           <a:xfrm>
-            <a:off x="7827264" y="5367528"/>
-            <a:ext cx="4032504" cy="484632"/>
+            <a:off x="7827264" y="5221223"/>
+            <a:ext cx="4032504" cy="466344"/>
           </a:xfrm>
           <a:prstGeom prst="rect">
             <a:avLst/>
@@ -37222,7 +37222,7 @@
         </p:nvCxnSpPr>
         <p:spPr>
           <a:xfrm>
-            <a:off x="338328" y="5852160"/>
+            <a:off x="338328" y="5687567"/>
             <a:ext cx="11521440" cy="0"/>
           </a:xfrm>
           <a:prstGeom prst="line">
@@ -37257,8 +37257,8 @@
         </p:nvSpPr>
         <p:spPr>
           <a:xfrm>
-            <a:off x="338328" y="5852160"/>
-            <a:ext cx="10287000" cy="384048"/>
+            <a:off x="338328" y="5760720"/>
+            <a:ext cx="10287000" cy="411480"/>
           </a:xfrm>
           <a:prstGeom prst="rect">
             <a:avLst/>
